--- a/misc/Menu Letter 8.5 by 11 on 12-12-24/1_Letter_DaBeast Services Menu.pptx
+++ b/misc/Menu Letter 8.5 by 11 on 12-12-24/1_Letter_DaBeast Services Menu.pptx
@@ -1833,7 +1833,7 @@
               <a:buSzPts val="1400"/>
               <a:buNone/>
             </a:pPr>
-            <a:endParaRPr/>
+            <a:endParaRPr dirty="0"/>
           </a:p>
         </p:txBody>
       </p:sp>
@@ -17061,22 +17061,10 @@
                 <a:cs typeface="Arial Narrow"/>
                 <a:sym typeface="Arial Narrow"/>
               </a:rPr>
-              <a:t>Fried Cheesecake Bites </a:t>
+              <a:t>Fried Cheesecake Bites …. </a:t>
             </a:r>
             <a:r>
-              <a:rPr lang="en-US" sz="2000" b="0" i="0" u="none" strike="noStrike" cap="none">
-                <a:solidFill>
-                  <a:schemeClr val="lt1"/>
-                </a:solidFill>
-                <a:latin typeface="Arial Narrow"/>
-                <a:ea typeface="Arial Narrow"/>
-                <a:cs typeface="Arial Narrow"/>
-                <a:sym typeface="Arial Narrow"/>
-              </a:rPr>
-              <a:t>…. </a:t>
-            </a:r>
-            <a:r>
-              <a:rPr lang="en-US" sz="2000" b="1" i="0" u="none" strike="noStrike" cap="none">
+              <a:rPr lang="en-US" sz="2000" b="1" i="0" u="none" strike="noStrike" cap="none" dirty="0">
                 <a:solidFill>
                   <a:srgbClr val="8CD872"/>
                 </a:solidFill>
@@ -17927,7 +17915,7 @@
         </p:blipFill>
         <p:spPr>
           <a:xfrm>
-            <a:off x="1436019" y="8808892"/>
+            <a:off x="2321844" y="8808892"/>
             <a:ext cx="782375" cy="782375"/>
           </a:xfrm>
           <a:prstGeom prst="rect">
@@ -17939,6 +17927,108 @@
           </a:ln>
         </p:spPr>
       </p:pic>
+      <p:sp>
+        <p:nvSpPr>
+          <p:cNvPr id="5" name="Google Shape;96;p13">
+            <a:extLst>
+              <a:ext uri="{FF2B5EF4-FFF2-40B4-BE49-F238E27FC236}">
+                <a16:creationId xmlns:a16="http://schemas.microsoft.com/office/drawing/2014/main" id="{70F4E655-D197-3D2A-6EB3-1754DE56ACA8}"/>
+              </a:ext>
+            </a:extLst>
+          </p:cNvPr>
+          <p:cNvSpPr txBox="1"/>
+          <p:nvPr/>
+        </p:nvSpPr>
+        <p:spPr>
+          <a:xfrm>
+            <a:off x="423698" y="8865132"/>
+            <a:ext cx="1894150" cy="609565"/>
+          </a:xfrm>
+          <a:prstGeom prst="rect">
+            <a:avLst/>
+          </a:prstGeom>
+          <a:noFill/>
+          <a:ln>
+            <a:noFill/>
+          </a:ln>
+        </p:spPr>
+        <p:txBody>
+          <a:bodyPr spcFirstLastPara="1" wrap="square" lIns="100775" tIns="50375" rIns="100775" bIns="50375" anchor="t" anchorCtr="0">
+            <a:spAutoFit/>
+          </a:bodyPr>
+          <a:lstStyle/>
+          <a:p>
+            <a:pPr>
+              <a:buSzPts val="4000"/>
+            </a:pPr>
+            <a:r>
+              <a:rPr lang="en-US" sz="1100" i="1" dirty="0">
+                <a:solidFill>
+                  <a:srgbClr val="8CD872"/>
+                </a:solidFill>
+                <a:latin typeface="Arial Narrow"/>
+                <a:sym typeface="Arial Narrow"/>
+              </a:rPr>
+              <a:t>Customer is responsible for any </a:t>
+            </a:r>
+            <a:r>
+              <a:rPr lang="en-US" sz="1100" i="1">
+                <a:solidFill>
+                  <a:srgbClr val="8CD872"/>
+                </a:solidFill>
+                <a:latin typeface="Arial Narrow"/>
+                <a:sym typeface="Arial Narrow"/>
+              </a:rPr>
+              <a:t>allergen disclosures.</a:t>
+            </a:r>
+            <a:endParaRPr lang="en-US" sz="1100" i="1" dirty="0">
+              <a:solidFill>
+                <a:srgbClr val="8CD872"/>
+              </a:solidFill>
+              <a:latin typeface="Arial Narrow"/>
+              <a:sym typeface="Arial Narrow"/>
+            </a:endParaRPr>
+          </a:p>
+          <a:p>
+            <a:pPr marL="0" marR="0" lvl="0" indent="0" algn="l" rtl="0">
+              <a:lnSpc>
+                <a:spcPct val="100000"/>
+              </a:lnSpc>
+              <a:spcBef>
+                <a:spcPts val="0"/>
+              </a:spcBef>
+              <a:spcAft>
+                <a:spcPts val="0"/>
+              </a:spcAft>
+              <a:buClr>
+                <a:srgbClr val="000000"/>
+              </a:buClr>
+              <a:buSzPts val="4000"/>
+              <a:buFont typeface="Arial"/>
+              <a:buNone/>
+            </a:pPr>
+            <a:r>
+              <a:rPr lang="en-US" sz="1100" i="1" dirty="0">
+                <a:solidFill>
+                  <a:srgbClr val="8CD872"/>
+                </a:solidFill>
+                <a:latin typeface="Arial Narrow"/>
+                <a:sym typeface="Arial Narrow"/>
+              </a:rPr>
+              <a:t>Listed prices are the cash price.</a:t>
+            </a:r>
+            <a:endParaRPr lang="en-US" sz="1100" i="1" u="none" strike="noStrike" cap="none" dirty="0">
+              <a:solidFill>
+                <a:srgbClr val="8CD872"/>
+              </a:solidFill>
+              <a:latin typeface="Arial Narrow"/>
+              <a:ea typeface="Arial"/>
+              <a:cs typeface="Arial"/>
+              <a:sym typeface="Arial Narrow"/>
+            </a:endParaRPr>
+          </a:p>
+        </p:txBody>
+      </p:sp>
     </p:spTree>
   </p:cSld>
   <p:clrMapOvr>
